--- a/module-05-dijkstra/slides/09-capstone-project.pptx
+++ b/module-05-dijkstra/slides/09-capstone-project.pptx
@@ -3172,7 +3172,7 @@
               </a:defRPr>
             </a:pPr>
             <a:r>
-              <a:t>Module 5: Dijkstra's Algorithm</a:t>
+              <a:t>Module 5: Dijkstra</a:t>
             </a:r>
           </a:p>
         </p:txBody>
@@ -3260,7 +3260,7 @@
               </a:defRPr>
             </a:pPr>
             <a:r>
-              <a:t>Integrate Dijkstra pathfinding, Navigator, rangefinder obstacle detection, and obstacle memory into a single program</a:t>
+              <a:t>Integrate Dijkstra pathfinding, drive_path(), rangefinder obstacle detection, and obstacle memory into a single program</a:t>
             </a:r>
           </a:p>
           <a:p>
@@ -4472,7 +4472,7 @@
                         </a:defRPr>
                       </a:pPr>
                       <a:r>
-                        <a:t>The Dijkstra class with compute_path</a:t>
+                        <a:t>`build_dijkstra_graph()` and `compute_dijkstra_path()`</a:t>
                       </a:r>
                     </a:p>
                   </a:txBody>
@@ -4512,7 +4512,7 @@
                         </a:defRPr>
                       </a:pPr>
                       <a:r>
-                        <a:t>Testing and swapping Dijkstra into Navigator</a:t>
+                        <a:t>Testing and swapping Dijkstra in via the dispatch function</a:t>
                       </a:r>
                     </a:p>
                   </a:txBody>
@@ -5179,8 +5179,8 @@
         </p:nvSpPr>
         <p:spPr>
           <a:xfrm>
-            <a:off x="548640" y="1371600"/>
-            <a:ext cx="10972800" cy="3200400"/>
+            <a:off x="548640" y="1645920"/>
+            <a:ext cx="10972800" cy="3840480"/>
           </a:xfrm>
           <a:prstGeom prst="roundRect">
             <a:avLst/>
@@ -5224,8 +5224,8 @@
         </p:nvSpPr>
         <p:spPr>
           <a:xfrm>
-            <a:off x="731520" y="1463040"/>
-            <a:ext cx="10607040" cy="3017520"/>
+            <a:off x="731520" y="1737360"/>
+            <a:ext cx="10607040" cy="3657600"/>
           </a:xfrm>
           <a:prstGeom prst="rect">
             <a:avLst/>
@@ -5242,7 +5242,7 @@
               <a:spcAft>
                 <a:spcPts val="100"/>
               </a:spcAft>
-              <a:defRPr sz="1300">
+              <a:defRPr sz="1800">
                 <a:solidFill>
                   <a:srgbClr val="333333"/>
                 </a:solidFill>
@@ -5250,7 +5250,7 @@
               </a:defRPr>
             </a:pPr>
             <a:r>
-              <a:t>from dijkstra import Dijkstra</a:t>
+              <a:t>from dijkstra import build_dijkstra_graph, compute_dijkstra_path</a:t>
             </a:r>
           </a:p>
           <a:p>
@@ -5258,7 +5258,7 @@
               <a:spcAft>
                 <a:spcPts val="100"/>
               </a:spcAft>
-              <a:defRPr sz="1300">
+              <a:defRPr sz="1800">
                 <a:solidFill>
                   <a:srgbClr val="333333"/>
                 </a:solidFill>
@@ -5266,7 +5266,7 @@
               </a:defRPr>
             </a:pPr>
             <a:r>
-              <a:t>from navigator import Navigator</a:t>
+              <a:t>from XRPLib.rangefinder import Rangefinder</a:t>
             </a:r>
           </a:p>
           <a:p>
@@ -5274,36 +5274,36 @@
               <a:spcAft>
                 <a:spcPts val="100"/>
               </a:spcAft>
-              <a:defRPr sz="1300">
+              <a:defRPr sz="1800">
                 <a:solidFill>
                   <a:srgbClr val="333333"/>
                 </a:solidFill>
                 <a:latin typeface="Courier New"/>
               </a:defRPr>
             </a:pPr>
-            <a:r>
-              <a:t>from XRPLib.rangefinder import Rangefinder</a:t>
-            </a:r>
           </a:p>
           <a:p>
             <a:pPr>
               <a:spcAft>
                 <a:spcPts val="100"/>
               </a:spcAft>
-              <a:defRPr sz="1300">
+              <a:defRPr sz="1800">
                 <a:solidFill>
                   <a:srgbClr val="333333"/>
                 </a:solidFill>
                 <a:latin typeface="Courier New"/>
               </a:defRPr>
             </a:pPr>
+            <a:r>
+              <a:t># Setup</a:t>
+            </a:r>
           </a:p>
           <a:p>
             <a:pPr>
               <a:spcAft>
                 <a:spcPts val="100"/>
               </a:spcAft>
-              <a:defRPr sz="1300">
+              <a:defRPr sz="1800">
                 <a:solidFill>
                   <a:srgbClr val="333333"/>
                 </a:solidFill>
@@ -5311,7 +5311,7 @@
               </a:defRPr>
             </a:pPr>
             <a:r>
-              <a:t># Setup</a:t>
+              <a:t>rangefinder = Rangefinder.get_default_rangefinder()</a:t>
             </a:r>
           </a:p>
           <a:p>
@@ -5319,7 +5319,7 @@
               <a:spcAft>
                 <a:spcPts val="100"/>
               </a:spcAft>
-              <a:defRPr sz="1300">
+              <a:defRPr sz="1800">
                 <a:solidFill>
                   <a:srgbClr val="333333"/>
                 </a:solidFill>
@@ -5327,7 +5327,7 @@
               </a:defRPr>
             </a:pPr>
             <a:r>
-              <a:t>rangefinder = Rangefinder.get_default_rangefinder()</a:t>
+              <a:t>blocked_nodes = load_obstacles()</a:t>
             </a:r>
           </a:p>
           <a:p>
@@ -5335,7 +5335,7 @@
               <a:spcAft>
                 <a:spcPts val="100"/>
               </a:spcAft>
-              <a:defRPr sz="1300">
+              <a:defRPr sz="1800">
                 <a:solidFill>
                   <a:srgbClr val="333333"/>
                 </a:solidFill>
@@ -5343,7 +5343,7 @@
               </a:defRPr>
             </a:pPr>
             <a:r>
-              <a:t>blocked_nodes = load_obstacles()</a:t>
+              <a:t>THRESHOLD = 15</a:t>
             </a:r>
           </a:p>
           <a:p>
@@ -5351,7 +5351,7 @@
               <a:spcAft>
                 <a:spcPts val="100"/>
               </a:spcAft>
-              <a:defRPr sz="1300">
+              <a:defRPr sz="1800">
                 <a:solidFill>
                   <a:srgbClr val="333333"/>
                 </a:solidFill>
@@ -5359,7 +5359,7 @@
               </a:defRPr>
             </a:pPr>
             <a:r>
-              <a:t>THRESHOLD = 15</a:t>
+              <a:t>step_count = 0</a:t>
             </a:r>
           </a:p>
           <a:p>
@@ -5367,36 +5367,36 @@
               <a:spcAft>
                 <a:spcPts val="100"/>
               </a:spcAft>
-              <a:defRPr sz="1300">
+              <a:defRPr sz="1800">
                 <a:solidFill>
                   <a:srgbClr val="333333"/>
                 </a:solidFill>
                 <a:latin typeface="Courier New"/>
               </a:defRPr>
             </a:pPr>
-            <a:r>
-              <a:t>step_count = 0</a:t>
-            </a:r>
           </a:p>
           <a:p>
             <a:pPr>
               <a:spcAft>
                 <a:spcPts val="100"/>
               </a:spcAft>
-              <a:defRPr sz="1300">
+              <a:defRPr sz="1800">
                 <a:solidFill>
                   <a:srgbClr val="333333"/>
                 </a:solidFill>
                 <a:latin typeface="Courier New"/>
               </a:defRPr>
             </a:pPr>
+            <a:r>
+              <a:t># Destinations to visit</a:t>
+            </a:r>
           </a:p>
           <a:p>
             <a:pPr>
               <a:spcAft>
                 <a:spcPts val="100"/>
               </a:spcAft>
-              <a:defRPr sz="1300">
+              <a:defRPr sz="1800">
                 <a:solidFill>
                   <a:srgbClr val="333333"/>
                 </a:solidFill>
@@ -5404,7 +5404,7 @@
               </a:defRPr>
             </a:pPr>
             <a:r>
-              <a:t># Destinations to visit</a:t>
+              <a:t>destinations = [(1, 3), (3, 3), (3, 0), (0, 2)]</a:t>
             </a:r>
           </a:p>
           <a:p>
@@ -5412,7 +5412,7 @@
               <a:spcAft>
                 <a:spcPts val="100"/>
               </a:spcAft>
-              <a:defRPr sz="1300">
+              <a:defRPr sz="1800">
                 <a:solidFill>
                   <a:srgbClr val="333333"/>
                 </a:solidFill>
@@ -5420,7 +5420,7 @@
               </a:defRPr>
             </a:pPr>
             <a:r>
-              <a:t>destinations = [(1, 3), (3, 3), (3, 0), (0, 2)]</a:t>
+              <a:t>current = (0, 0)</a:t>
             </a:r>
           </a:p>
           <a:p>
@@ -5428,36 +5428,36 @@
               <a:spcAft>
                 <a:spcPts val="100"/>
               </a:spcAft>
-              <a:defRPr sz="1300">
+              <a:defRPr sz="1800">
                 <a:solidFill>
                   <a:srgbClr val="333333"/>
                 </a:solidFill>
                 <a:latin typeface="Courier New"/>
               </a:defRPr>
             </a:pPr>
-            <a:r>
-              <a:t>current = (0, 0)</a:t>
-            </a:r>
           </a:p>
           <a:p>
             <a:pPr>
               <a:spcAft>
                 <a:spcPts val="100"/>
               </a:spcAft>
-              <a:defRPr sz="1300">
+              <a:defRPr sz="1800">
                 <a:solidFill>
                   <a:srgbClr val="333333"/>
                 </a:solidFill>
                 <a:latin typeface="Courier New"/>
               </a:defRPr>
             </a:pPr>
+            <a:r>
+              <a:t># Main loop</a:t>
+            </a:r>
           </a:p>
           <a:p>
             <a:pPr>
               <a:spcAft>
                 <a:spcPts val="100"/>
               </a:spcAft>
-              <a:defRPr sz="1300">
+              <a:defRPr sz="1800">
                 <a:solidFill>
                   <a:srgbClr val="333333"/>
                 </a:solidFill>
@@ -5465,7 +5465,7 @@
               </a:defRPr>
             </a:pPr>
             <a:r>
-              <a:t># Main loop</a:t>
+              <a:t>for dest in destinations:</a:t>
             </a:r>
           </a:p>
           <a:p>
@@ -5473,7 +5473,7 @@
               <a:spcAft>
                 <a:spcPts val="100"/>
               </a:spcAft>
-              <a:defRPr sz="1300">
+              <a:defRPr sz="1800">
                 <a:solidFill>
                   <a:srgbClr val="333333"/>
                 </a:solidFill>
@@ -5481,7 +5481,7 @@
               </a:defRPr>
             </a:pPr>
             <a:r>
-              <a:t>for dest in destinations:</a:t>
+              <a:t>    print(f"Heading to {dest}...")</a:t>
             </a:r>
           </a:p>
           <a:p>
@@ -5489,7 +5489,7 @@
               <a:spcAft>
                 <a:spcPts val="100"/>
               </a:spcAft>
-              <a:defRPr sz="1300">
+              <a:defRPr sz="1800">
                 <a:solidFill>
                   <a:srgbClr val="333333"/>
                 </a:solidFill>
@@ -5497,7 +5497,7 @@
               </a:defRPr>
             </a:pPr>
             <a:r>
-              <a:t>    print(f"Heading to {dest}...")</a:t>
+              <a:t>    arrived = False</a:t>
             </a:r>
           </a:p>
           <a:p>
@@ -5505,7 +5505,7 @@
               <a:spcAft>
                 <a:spcPts val="100"/>
               </a:spcAft>
-              <a:defRPr sz="1300">
+              <a:defRPr sz="1800">
                 <a:solidFill>
                   <a:srgbClr val="333333"/>
                 </a:solidFill>
@@ -5513,7 +5513,7 @@
               </a:defRPr>
             </a:pPr>
             <a:r>
-              <a:t>    arrived = False</a:t>
+              <a:t>    while not arrived:</a:t>
             </a:r>
           </a:p>
           <a:p>
@@ -5521,7 +5521,7 @@
               <a:spcAft>
                 <a:spcPts val="100"/>
               </a:spcAft>
-              <a:defRPr sz="1300">
+              <a:defRPr sz="1800">
                 <a:solidFill>
                   <a:srgbClr val="333333"/>
                 </a:solidFill>
@@ -5529,7 +5529,7 @@
               </a:defRPr>
             </a:pPr>
             <a:r>
-              <a:t>    while not arrived:</a:t>
+              <a:t>        graph = build_dijkstra_graph(4, 4, blocked_nodes)</a:t>
             </a:r>
           </a:p>
           <a:p>
@@ -5537,7 +5537,7 @@
               <a:spcAft>
                 <a:spcPts val="100"/>
               </a:spcAft>
-              <a:defRPr sz="1300">
+              <a:defRPr sz="1800">
                 <a:solidFill>
                   <a:srgbClr val="333333"/>
                 </a:solidFill>
@@ -5545,7 +5545,7 @@
               </a:defRPr>
             </a:pPr>
             <a:r>
-              <a:t>        pathfinder = Dijkstra(current, blocked_nodes)</a:t>
+              <a:t>        path = compute_dijkstra_path(current, dest, graph)</a:t>
             </a:r>
           </a:p>
           <a:p>
@@ -5553,7 +5553,7 @@
               <a:spcAft>
                 <a:spcPts val="100"/>
               </a:spcAft>
-              <a:defRPr sz="1300">
+              <a:defRPr sz="1800">
                 <a:solidFill>
                   <a:srgbClr val="333333"/>
                 </a:solidFill>
@@ -5561,7 +5561,7 @@
               </a:defRPr>
             </a:pPr>
             <a:r>
-              <a:t>        path = pathfinder.compute_path(dest)</a:t>
+              <a:t>        # Navigate along path with obstacle checking</a:t>
             </a:r>
           </a:p>
           <a:p>
@@ -5569,7 +5569,7 @@
               <a:spcAft>
                 <a:spcPts val="100"/>
               </a:spcAft>
-              <a:defRPr sz="1300">
+              <a:defRPr sz="1800">
                 <a:solidFill>
                   <a:srgbClr val="333333"/>
                 </a:solidFill>
@@ -5577,7 +5577,7 @@
               </a:defRPr>
             </a:pPr>
             <a:r>
-              <a:t>        # Navigate along path with obstacle checking</a:t>
+              <a:t>        # If obstacle found: update blocked_nodes, recompute</a:t>
             </a:r>
           </a:p>
           <a:p>
@@ -5585,7 +5585,7 @@
               <a:spcAft>
                 <a:spcPts val="100"/>
               </a:spcAft>
-              <a:defRPr sz="1300">
+              <a:defRPr sz="1800">
                 <a:solidFill>
                   <a:srgbClr val="333333"/>
                 </a:solidFill>
@@ -5593,7 +5593,7 @@
               </a:defRPr>
             </a:pPr>
             <a:r>
-              <a:t>        # If obstacle found: update blocked_nodes, recompute</a:t>
+              <a:t>        # If no obstacle: drive to next intersection</a:t>
             </a:r>
           </a:p>
           <a:p>
@@ -5601,7 +5601,7 @@
               <a:spcAft>
                 <a:spcPts val="100"/>
               </a:spcAft>
-              <a:defRPr sz="1300">
+              <a:defRPr sz="1800">
                 <a:solidFill>
                   <a:srgbClr val="333333"/>
                 </a:solidFill>
@@ -5609,7 +5609,7 @@
               </a:defRPr>
             </a:pPr>
             <a:r>
-              <a:t>        # If no obstacle: drive to next intersection</a:t>
+              <a:t>        # Update current position and step_count</a:t>
             </a:r>
           </a:p>
           <a:p>
@@ -5617,7 +5617,7 @@
               <a:spcAft>
                 <a:spcPts val="100"/>
               </a:spcAft>
-              <a:defRPr sz="1300">
+              <a:defRPr sz="1800">
                 <a:solidFill>
                   <a:srgbClr val="333333"/>
                 </a:solidFill>
@@ -5625,7 +5625,7 @@
               </a:defRPr>
             </a:pPr>
             <a:r>
-              <a:t>        # Update current position and step_count</a:t>
+              <a:t>    print(f"Arrived at {dest}!")</a:t>
             </a:r>
           </a:p>
           <a:p>
@@ -5633,36 +5633,36 @@
               <a:spcAft>
                 <a:spcPts val="100"/>
               </a:spcAft>
-              <a:defRPr sz="1300">
+              <a:defRPr sz="1800">
                 <a:solidFill>
                   <a:srgbClr val="333333"/>
                 </a:solidFill>
                 <a:latin typeface="Courier New"/>
               </a:defRPr>
             </a:pPr>
-            <a:r>
-              <a:t>    print(f"Arrived at {dest}!")</a:t>
-            </a:r>
           </a:p>
           <a:p>
             <a:pPr>
               <a:spcAft>
                 <a:spcPts val="100"/>
               </a:spcAft>
-              <a:defRPr sz="1300">
+              <a:defRPr sz="1800">
                 <a:solidFill>
                   <a:srgbClr val="333333"/>
                 </a:solidFill>
                 <a:latin typeface="Courier New"/>
               </a:defRPr>
             </a:pPr>
+            <a:r>
+              <a:t># Save and report</a:t>
+            </a:r>
           </a:p>
           <a:p>
             <a:pPr>
               <a:spcAft>
                 <a:spcPts val="100"/>
               </a:spcAft>
-              <a:defRPr sz="1300">
+              <a:defRPr sz="1800">
                 <a:solidFill>
                   <a:srgbClr val="333333"/>
                 </a:solidFill>
@@ -5670,7 +5670,7 @@
               </a:defRPr>
             </a:pPr>
             <a:r>
-              <a:t># Save and report</a:t>
+              <a:t>save_obstacles(blocked_nodes)</a:t>
             </a:r>
           </a:p>
           <a:p>
@@ -5678,7 +5678,7 @@
               <a:spcAft>
                 <a:spcPts val="100"/>
               </a:spcAft>
-              <a:defRPr sz="1300">
+              <a:defRPr sz="1800">
                 <a:solidFill>
                   <a:srgbClr val="333333"/>
                 </a:solidFill>
@@ -5686,7 +5686,7 @@
               </a:defRPr>
             </a:pPr>
             <a:r>
-              <a:t>save_obstacles(blocked_nodes)</a:t>
+              <a:t>print(f"Total steps: {step_count}")</a:t>
             </a:r>
           </a:p>
           <a:p>
@@ -5694,23 +5694,7 @@
               <a:spcAft>
                 <a:spcPts val="100"/>
               </a:spcAft>
-              <a:defRPr sz="1300">
-                <a:solidFill>
-                  <a:srgbClr val="333333"/>
-                </a:solidFill>
-                <a:latin typeface="Courier New"/>
-              </a:defRPr>
-            </a:pPr>
-            <a:r>
-              <a:t>print(f"Total steps: {step_count}")</a:t>
-            </a:r>
-          </a:p>
-          <a:p>
-            <a:pPr>
-              <a:spcAft>
-                <a:spcPts val="100"/>
-              </a:spcAft>
-              <a:defRPr sz="1300">
+              <a:defRPr sz="1800">
                 <a:solidFill>
                   <a:srgbClr val="333333"/>
                 </a:solidFill>
@@ -5880,8 +5864,8 @@
         </p:nvSpPr>
         <p:spPr>
           <a:xfrm>
-            <a:off x="548640" y="1371600"/>
-            <a:ext cx="10972800" cy="3200400"/>
+            <a:off x="548640" y="1645920"/>
+            <a:ext cx="10972800" cy="3840480"/>
           </a:xfrm>
           <a:prstGeom prst="roundRect">
             <a:avLst/>
@@ -5925,8 +5909,8 @@
         </p:nvSpPr>
         <p:spPr>
           <a:xfrm>
-            <a:off x="731520" y="1463040"/>
-            <a:ext cx="10607040" cy="3017520"/>
+            <a:off x="731520" y="1737360"/>
+            <a:ext cx="10607040" cy="3657600"/>
           </a:xfrm>
           <a:prstGeom prst="rect">
             <a:avLst/>
@@ -5943,7 +5927,7 @@
               <a:spcAft>
                 <a:spcPts val="100"/>
               </a:spcAft>
-              <a:defRPr sz="1300">
+              <a:defRPr sz="1800">
                 <a:solidFill>
                   <a:srgbClr val="333333"/>
                 </a:solidFill>
@@ -5959,7 +5943,7 @@
               <a:spcAft>
                 <a:spcPts val="100"/>
               </a:spcAft>
-              <a:defRPr sz="1300">
+              <a:defRPr sz="1800">
                 <a:solidFill>
                   <a:srgbClr val="333333"/>
                 </a:solidFill>
@@ -5975,7 +5959,7 @@
               <a:spcAft>
                 <a:spcPts val="100"/>
               </a:spcAft>
-              <a:defRPr sz="1300">
+              <a:defRPr sz="1800">
                 <a:solidFill>
                   <a:srgbClr val="333333"/>
                 </a:solidFill>
@@ -5991,7 +5975,7 @@
               <a:spcAft>
                 <a:spcPts val="100"/>
               </a:spcAft>
-              <a:defRPr sz="1300">
+              <a:defRPr sz="1800">
                 <a:solidFill>
                   <a:srgbClr val="333333"/>
                 </a:solidFill>
@@ -5999,7 +5983,7 @@
               </a:defRPr>
             </a:pPr>
             <a:r>
-              <a:t>        pathfinder = Dijkstra(current, blocked_nodes)</a:t>
+              <a:t>        graph = build_dijkstra_graph(4, 4, blocked_nodes)</a:t>
             </a:r>
           </a:p>
           <a:p>
@@ -6007,7 +5991,7 @@
               <a:spcAft>
                 <a:spcPts val="100"/>
               </a:spcAft>
-              <a:defRPr sz="1300">
+              <a:defRPr sz="1800">
                 <a:solidFill>
                   <a:srgbClr val="333333"/>
                 </a:solidFill>
@@ -6015,7 +5999,7 @@
               </a:defRPr>
             </a:pPr>
             <a:r>
-              <a:t>        path = pathfinder.compute_path(dest)</a:t>
+              <a:t>        path = compute_dijkstra_path(current, dest, graph)</a:t>
             </a:r>
           </a:p>
           <a:p>
@@ -6023,7 +6007,7 @@
               <a:spcAft>
                 <a:spcPts val="100"/>
               </a:spcAft>
-              <a:defRPr sz="1300">
+              <a:defRPr sz="1800">
                 <a:solidFill>
                   <a:srgbClr val="333333"/>
                 </a:solidFill>
@@ -6036,7 +6020,7 @@
               <a:spcAft>
                 <a:spcPts val="100"/>
               </a:spcAft>
-              <a:defRPr sz="1300">
+              <a:defRPr sz="1800">
                 <a:solidFill>
                   <a:srgbClr val="333333"/>
                 </a:solidFill>
@@ -6052,7 +6036,7 @@
               <a:spcAft>
                 <a:spcPts val="100"/>
               </a:spcAft>
-              <a:defRPr sz="1300">
+              <a:defRPr sz="1800">
                 <a:solidFill>
                   <a:srgbClr val="333333"/>
                 </a:solidFill>
@@ -6068,7 +6052,7 @@
               <a:spcAft>
                 <a:spcPts val="100"/>
               </a:spcAft>
-              <a:defRPr sz="1300">
+              <a:defRPr sz="1800">
                 <a:solidFill>
                   <a:srgbClr val="333333"/>
                 </a:solidFill>
@@ -6084,7 +6068,7 @@
               <a:spcAft>
                 <a:spcPts val="100"/>
               </a:spcAft>
-              <a:defRPr sz="1300">
+              <a:defRPr sz="1800">
                 <a:solidFill>
                   <a:srgbClr val="333333"/>
                 </a:solidFill>
@@ -6097,7 +6081,7 @@
               <a:spcAft>
                 <a:spcPts val="100"/>
               </a:spcAft>
-              <a:defRPr sz="1300">
+              <a:defRPr sz="1800">
                 <a:solidFill>
                   <a:srgbClr val="333333"/>
                 </a:solidFill>
@@ -6113,7 +6097,7 @@
               <a:spcAft>
                 <a:spcPts val="100"/>
               </a:spcAft>
-              <a:defRPr sz="1300">
+              <a:defRPr sz="1800">
                 <a:solidFill>
                   <a:srgbClr val="333333"/>
                 </a:solidFill>
@@ -6129,7 +6113,7 @@
               <a:spcAft>
                 <a:spcPts val="100"/>
               </a:spcAft>
-              <a:defRPr sz="1300">
+              <a:defRPr sz="1800">
                 <a:solidFill>
                   <a:srgbClr val="333333"/>
                 </a:solidFill>
@@ -6145,7 +6129,7 @@
               <a:spcAft>
                 <a:spcPts val="100"/>
               </a:spcAft>
-              <a:defRPr sz="1300">
+              <a:defRPr sz="1800">
                 <a:solidFill>
                   <a:srgbClr val="333333"/>
                 </a:solidFill>
@@ -6161,7 +6145,7 @@
               <a:spcAft>
                 <a:spcPts val="100"/>
               </a:spcAft>
-              <a:defRPr sz="1300">
+              <a:defRPr sz="1800">
                 <a:solidFill>
                   <a:srgbClr val="333333"/>
                 </a:solidFill>
@@ -6177,7 +6161,7 @@
               <a:spcAft>
                 <a:spcPts val="100"/>
               </a:spcAft>
-              <a:defRPr sz="1300">
+              <a:defRPr sz="1800">
                 <a:solidFill>
                   <a:srgbClr val="333333"/>
                 </a:solidFill>
@@ -6193,7 +6177,7 @@
               <a:spcAft>
                 <a:spcPts val="100"/>
               </a:spcAft>
-              <a:defRPr sz="1300">
+              <a:defRPr sz="1800">
                 <a:solidFill>
                   <a:srgbClr val="333333"/>
                 </a:solidFill>
@@ -6209,7 +6193,7 @@
               <a:spcAft>
                 <a:spcPts val="100"/>
               </a:spcAft>
-              <a:defRPr sz="1300">
+              <a:defRPr sz="1800">
                 <a:solidFill>
                   <a:srgbClr val="333333"/>
                 </a:solidFill>
@@ -6225,7 +6209,7 @@
               <a:spcAft>
                 <a:spcPts val="100"/>
               </a:spcAft>
-              <a:defRPr sz="1300">
+              <a:defRPr sz="1800">
                 <a:solidFill>
                   <a:srgbClr val="333333"/>
                 </a:solidFill>
@@ -6241,7 +6225,7 @@
               <a:spcAft>
                 <a:spcPts val="100"/>
               </a:spcAft>
-              <a:defRPr sz="1300">
+              <a:defRPr sz="1800">
                 <a:solidFill>
                   <a:srgbClr val="333333"/>
                 </a:solidFill>
@@ -6249,7 +6233,7 @@
               </a:defRPr>
             </a:pPr>
             <a:r>
-              <a:t>            # Drive one segment</a:t>
+              <a:t>            # Drive one segment (turn_to + track_until_cross)</a:t>
             </a:r>
           </a:p>
           <a:p>
@@ -6257,7 +6241,7 @@
               <a:spcAft>
                 <a:spcPts val="100"/>
               </a:spcAft>
-              <a:defRPr sz="1300">
+              <a:defRPr sz="1800">
                 <a:solidFill>
                   <a:srgbClr val="333333"/>
                 </a:solidFill>
@@ -6265,7 +6249,7 @@
               </a:defRPr>
             </a:pPr>
             <a:r>
-              <a:t>            nav.drive_segment(path[i], path[i + 1])</a:t>
+              <a:t>            current = path[i + 1]</a:t>
             </a:r>
           </a:p>
           <a:p>
@@ -6273,7 +6257,7 @@
               <a:spcAft>
                 <a:spcPts val="100"/>
               </a:spcAft>
-              <a:defRPr sz="1300">
+              <a:defRPr sz="1800">
                 <a:solidFill>
                   <a:srgbClr val="333333"/>
                 </a:solidFill>
@@ -6281,7 +6265,7 @@
               </a:defRPr>
             </a:pPr>
             <a:r>
-              <a:t>            current = path[i + 1]</a:t>
+              <a:t>            step_count = step_count + 1</a:t>
             </a:r>
           </a:p>
           <a:p>
@@ -6289,52 +6273,36 @@
               <a:spcAft>
                 <a:spcPts val="100"/>
               </a:spcAft>
-              <a:defRPr sz="1300">
+              <a:defRPr sz="1800">
                 <a:solidFill>
                   <a:srgbClr val="333333"/>
                 </a:solidFill>
                 <a:latin typeface="Courier New"/>
               </a:defRPr>
             </a:pPr>
-            <a:r>
-              <a:t>            step_count = step_count + 1</a:t>
-            </a:r>
           </a:p>
           <a:p>
             <a:pPr>
               <a:spcAft>
                 <a:spcPts val="100"/>
               </a:spcAft>
-              <a:defRPr sz="1300">
+              <a:defRPr sz="1800">
                 <a:solidFill>
                   <a:srgbClr val="333333"/>
                 </a:solidFill>
                 <a:latin typeface="Courier New"/>
               </a:defRPr>
             </a:pPr>
+            <a:r>
+              <a:t>        if not rerouted:</a:t>
+            </a:r>
           </a:p>
           <a:p>
             <a:pPr>
               <a:spcAft>
                 <a:spcPts val="100"/>
               </a:spcAft>
-              <a:defRPr sz="1300">
-                <a:solidFill>
-                  <a:srgbClr val="333333"/>
-                </a:solidFill>
-                <a:latin typeface="Courier New"/>
-              </a:defRPr>
-            </a:pPr>
-            <a:r>
-              <a:t>        if not rerouted:</a:t>
-            </a:r>
-          </a:p>
-          <a:p>
-            <a:pPr>
-              <a:spcAft>
-                <a:spcPts val="100"/>
-              </a:spcAft>
-              <a:defRPr sz="1300">
+              <a:defRPr sz="1800">
                 <a:solidFill>
                   <a:srgbClr val="333333"/>
                 </a:solidFill>
@@ -6355,7 +6323,7 @@
         </p:nvSpPr>
         <p:spPr>
           <a:xfrm>
-            <a:off x="548640" y="4709160"/>
+            <a:off x="548640" y="5623560"/>
             <a:ext cx="10972800" cy="365760"/>
           </a:xfrm>
           <a:prstGeom prst="rect">
@@ -6779,7 +6747,7 @@
               <a:spcAft>
                 <a:spcPts val="100"/>
               </a:spcAft>
-              <a:defRPr sz="1300">
+              <a:defRPr sz="1800">
                 <a:solidFill>
                   <a:srgbClr val="333333"/>
                 </a:solidFill>
@@ -6795,7 +6763,7 @@
               <a:spcAft>
                 <a:spcPts val="100"/>
               </a:spcAft>
-              <a:defRPr sz="1300">
+              <a:defRPr sz="1800">
                 <a:solidFill>
                   <a:srgbClr val="333333"/>
                 </a:solidFill>
@@ -6844,30 +6812,6 @@
           </a:p>
         </p:txBody>
       </p:sp>
-      <p:pic>
-        <p:nvPicPr>
-          <p:cNvPr id="8" name="Picture 7" descr="run1-vs-run2.png"/>
-          <p:cNvPicPr>
-            <a:picLocks noChangeAspect="1"/>
-          </p:cNvPicPr>
-          <p:nvPr/>
-        </p:nvPicPr>
-        <p:blipFill>
-          <a:blip r:embed="rId2"/>
-          <a:stretch>
-            <a:fillRect/>
-          </a:stretch>
-        </p:blipFill>
-        <p:spPr>
-          <a:xfrm>
-            <a:off x="731520" y="1645920"/>
-            <a:ext cx="5943600" cy="2409905"/>
-          </a:xfrm>
-          <a:prstGeom prst="rect">
-            <a:avLst/>
-          </a:prstGeom>
-        </p:spPr>
-      </p:pic>
     </p:spTree>
   </p:cSld>
   <p:clrMapOvr>
@@ -7126,7 +7070,7 @@
                         </a:defRPr>
                       </a:pPr>
                       <a:r>
-                        <a:t>Dijkstra Pathfinding</a:t>
+                        <a:t>**Dijkstra Pathfinding**</a:t>
                       </a:r>
                     </a:p>
                   </a:txBody>
@@ -7160,7 +7104,7 @@
                         </a:defRPr>
                       </a:pPr>
                       <a:r>
-                        <a:t>Uses Dijkstra class to compute paths; paths are correct</a:t>
+                        <a:t>Uses `compute_dijkstra_path()` to compute paths; paths are correct and shortest</a:t>
                       </a:r>
                     </a:p>
                   </a:txBody>
@@ -7179,7 +7123,7 @@
                         </a:defRPr>
                       </a:pPr>
                       <a:r>
-                        <a:t>Navigator Integration</a:t>
+                        <a:t>**Driving Integration**</a:t>
                       </a:r>
                     </a:p>
                   </a:txBody>
@@ -7244,7 +7188,7 @@
                         </a:defRPr>
                       </a:pPr>
                       <a:r>
-                        <a:t>Obstacle Detection</a:t>
+                        <a:t>**Obstacle Detection**</a:t>
                       </a:r>
                     </a:p>
                   </a:txBody>
@@ -7297,7 +7241,7 @@
                         </a:defRPr>
                       </a:pPr>
                       <a:r>
-                        <a:t>Path Recomputation</a:t>
+                        <a:t>**Path Recomputation**</a:t>
                       </a:r>
                     </a:p>
                   </a:txBody>
@@ -7362,7 +7306,7 @@
                         </a:defRPr>
                       </a:pPr>
                       <a:r>
-                        <a:t>Experience (File I/O)</a:t>
+                        <a:t>**Experience (File I/O)**</a:t>
                       </a:r>
                     </a:p>
                   </a:txBody>
@@ -7415,7 +7359,7 @@
                         </a:defRPr>
                       </a:pPr>
                       <a:r>
-                        <a:t>Demonstration</a:t>
+                        <a:t>**Demonstration**</a:t>
                       </a:r>
                     </a:p>
                   </a:txBody>
@@ -7480,7 +7424,7 @@
                         </a:defRPr>
                       </a:pPr>
                       <a:r>
-                        <a:t>Code Quality</a:t>
+                        <a:t>**Code Quality**</a:t>
                       </a:r>
                     </a:p>
                   </a:txBody>
@@ -7911,7 +7855,7 @@
         <p:spPr>
           <a:xfrm>
             <a:off x="548640" y="4937760"/>
-            <a:ext cx="5669280" cy="1188720"/>
+            <a:ext cx="5669280" cy="1005840"/>
           </a:xfrm>
           <a:prstGeom prst="roundRect">
             <a:avLst/>
@@ -7956,7 +7900,7 @@
         <p:spPr>
           <a:xfrm>
             <a:off x="731520" y="5029200"/>
-            <a:ext cx="5303520" cy="1005840"/>
+            <a:ext cx="5303520" cy="822960"/>
           </a:xfrm>
           <a:prstGeom prst="rect">
             <a:avLst/>
@@ -7973,7 +7917,7 @@
               <a:spcAft>
                 <a:spcPts val="100"/>
               </a:spcAft>
-              <a:defRPr sz="1300">
+              <a:defRPr sz="1800">
                 <a:solidFill>
                   <a:srgbClr val="333333"/>
                 </a:solidFill>
@@ -7989,7 +7933,7 @@
               <a:spcAft>
                 <a:spcPts val="100"/>
               </a:spcAft>
-              <a:defRPr sz="1300">
+              <a:defRPr sz="1800">
                 <a:solidFill>
                   <a:srgbClr val="333333"/>
                 </a:solidFill>
@@ -8005,7 +7949,7 @@
               <a:spcAft>
                 <a:spcPts val="100"/>
               </a:spcAft>
-              <a:defRPr sz="1300">
+              <a:defRPr sz="1800">
                 <a:solidFill>
                   <a:srgbClr val="333333"/>
                 </a:solidFill>
@@ -8021,7 +7965,7 @@
               <a:spcAft>
                 <a:spcPts val="100"/>
               </a:spcAft>
-              <a:defRPr sz="1300">
+              <a:defRPr sz="1800">
                 <a:solidFill>
                   <a:srgbClr val="333333"/>
                 </a:solidFill>
@@ -8043,7 +7987,7 @@
         <p:spPr>
           <a:xfrm>
             <a:off x="6583680" y="4937760"/>
-            <a:ext cx="5029200" cy="1188720"/>
+            <a:ext cx="5029200" cy="1005840"/>
           </a:xfrm>
           <a:prstGeom prst="rect">
             <a:avLst/>
@@ -8234,7 +8178,7 @@
               </a:defRPr>
             </a:pPr>
             <a:r>
-              <a:t>You should already have: Dijkstra class, Navigator, rangefinder reading, save/load functions</a:t>
+              <a:t>You should already have: build_dijkstra_graph()/compute_dijkstra_path(), drive_path(), rangefinder reading, save/load functions</a:t>
             </a:r>
           </a:p>
           <a:p>
